--- a/figure_pipeline/fig4_e_validation/assemble_fig4/assemble_fig4.pptx
+++ b/figure_pipeline/fig4_e_validation/assemble_fig4/assemble_fig4.pptx
@@ -259,7 +259,7 @@
           <a:p>
             <a:fld id="{513CA52F-1DA9-4BF4-A3AC-3E0151F9508D}" type="datetimeFigureOut">
               <a:rPr lang="en-US" smtClean="0"/>
-              <a:t>1/16/2026</a:t>
+              <a:t>4/7/2026</a:t>
             </a:fld>
             <a:endParaRPr lang="en-US"/>
           </a:p>
@@ -457,7 +457,7 @@
           <a:p>
             <a:fld id="{513CA52F-1DA9-4BF4-A3AC-3E0151F9508D}" type="datetimeFigureOut">
               <a:rPr lang="en-US" smtClean="0"/>
-              <a:t>1/16/2026</a:t>
+              <a:t>4/7/2026</a:t>
             </a:fld>
             <a:endParaRPr lang="en-US"/>
           </a:p>
@@ -665,7 +665,7 @@
           <a:p>
             <a:fld id="{513CA52F-1DA9-4BF4-A3AC-3E0151F9508D}" type="datetimeFigureOut">
               <a:rPr lang="en-US" smtClean="0"/>
-              <a:t>1/16/2026</a:t>
+              <a:t>4/7/2026</a:t>
             </a:fld>
             <a:endParaRPr lang="en-US"/>
           </a:p>
@@ -863,7 +863,7 @@
           <a:p>
             <a:fld id="{513CA52F-1DA9-4BF4-A3AC-3E0151F9508D}" type="datetimeFigureOut">
               <a:rPr lang="en-US" smtClean="0"/>
-              <a:t>1/16/2026</a:t>
+              <a:t>4/7/2026</a:t>
             </a:fld>
             <a:endParaRPr lang="en-US"/>
           </a:p>
@@ -1138,7 +1138,7 @@
           <a:p>
             <a:fld id="{513CA52F-1DA9-4BF4-A3AC-3E0151F9508D}" type="datetimeFigureOut">
               <a:rPr lang="en-US" smtClean="0"/>
-              <a:t>1/16/2026</a:t>
+              <a:t>4/7/2026</a:t>
             </a:fld>
             <a:endParaRPr lang="en-US"/>
           </a:p>
@@ -1403,7 +1403,7 @@
           <a:p>
             <a:fld id="{513CA52F-1DA9-4BF4-A3AC-3E0151F9508D}" type="datetimeFigureOut">
               <a:rPr lang="en-US" smtClean="0"/>
-              <a:t>1/16/2026</a:t>
+              <a:t>4/7/2026</a:t>
             </a:fld>
             <a:endParaRPr lang="en-US"/>
           </a:p>
@@ -1815,7 +1815,7 @@
           <a:p>
             <a:fld id="{513CA52F-1DA9-4BF4-A3AC-3E0151F9508D}" type="datetimeFigureOut">
               <a:rPr lang="en-US" smtClean="0"/>
-              <a:t>1/16/2026</a:t>
+              <a:t>4/7/2026</a:t>
             </a:fld>
             <a:endParaRPr lang="en-US"/>
           </a:p>
@@ -1956,7 +1956,7 @@
           <a:p>
             <a:fld id="{513CA52F-1DA9-4BF4-A3AC-3E0151F9508D}" type="datetimeFigureOut">
               <a:rPr lang="en-US" smtClean="0"/>
-              <a:t>1/16/2026</a:t>
+              <a:t>4/7/2026</a:t>
             </a:fld>
             <a:endParaRPr lang="en-US"/>
           </a:p>
@@ -2069,7 +2069,7 @@
           <a:p>
             <a:fld id="{513CA52F-1DA9-4BF4-A3AC-3E0151F9508D}" type="datetimeFigureOut">
               <a:rPr lang="en-US" smtClean="0"/>
-              <a:t>1/16/2026</a:t>
+              <a:t>4/7/2026</a:t>
             </a:fld>
             <a:endParaRPr lang="en-US"/>
           </a:p>
@@ -2380,7 +2380,7 @@
           <a:p>
             <a:fld id="{513CA52F-1DA9-4BF4-A3AC-3E0151F9508D}" type="datetimeFigureOut">
               <a:rPr lang="en-US" smtClean="0"/>
-              <a:t>1/16/2026</a:t>
+              <a:t>4/7/2026</a:t>
             </a:fld>
             <a:endParaRPr lang="en-US"/>
           </a:p>
@@ -2668,7 +2668,7 @@
           <a:p>
             <a:fld id="{513CA52F-1DA9-4BF4-A3AC-3E0151F9508D}" type="datetimeFigureOut">
               <a:rPr lang="en-US" smtClean="0"/>
-              <a:t>1/16/2026</a:t>
+              <a:t>4/7/2026</a:t>
             </a:fld>
             <a:endParaRPr lang="en-US"/>
           </a:p>
@@ -2909,7 +2909,7 @@
           <a:p>
             <a:fld id="{513CA52F-1DA9-4BF4-A3AC-3E0151F9508D}" type="datetimeFigureOut">
               <a:rPr lang="en-US" smtClean="0"/>
-              <a:t>1/16/2026</a:t>
+              <a:t>4/7/2026</a:t>
             </a:fld>
             <a:endParaRPr lang="en-US"/>
           </a:p>
@@ -3328,10 +3328,10 @@
       </p:grpSpPr>
       <p:pic>
         <p:nvPicPr>
-          <p:cNvPr id="10" name="Picture 9">
-            <a:extLst>
-              <a:ext uri="{FF2B5EF4-FFF2-40B4-BE49-F238E27FC236}">
-                <a16:creationId xmlns:a16="http://schemas.microsoft.com/office/drawing/2014/main" id="{E1484F45-BA6B-3951-C5E1-77FBB6B96F62}"/>
+          <p:cNvPr id="12" name="Picture 11">
+            <a:extLst>
+              <a:ext uri="{FF2B5EF4-FFF2-40B4-BE49-F238E27FC236}">
+                <a16:creationId xmlns:a16="http://schemas.microsoft.com/office/drawing/2014/main" id="{02A840FB-BDFA-7532-DFCB-7667D6AFA169}"/>
               </a:ext>
             </a:extLst>
           </p:cNvPr>
@@ -3342,114 +3342,6 @@
         </p:nvPicPr>
         <p:blipFill>
           <a:blip r:embed="rId2">
-            <a:extLst>
-              <a:ext uri="{28A0092B-C50C-407E-A947-70E740481C1C}">
-                <a14:useLocalDpi xmlns:a14="http://schemas.microsoft.com/office/drawing/2010/main" val="0"/>
-              </a:ext>
-            </a:extLst>
-          </a:blip>
-          <a:stretch>
-            <a:fillRect/>
-          </a:stretch>
-        </p:blipFill>
-        <p:spPr>
-          <a:xfrm>
-            <a:off x="0" y="2203921"/>
-            <a:ext cx="3712792" cy="3300259"/>
-          </a:xfrm>
-          <a:prstGeom prst="rect">
-            <a:avLst/>
-          </a:prstGeom>
-        </p:spPr>
-      </p:pic>
-      <p:pic>
-        <p:nvPicPr>
-          <p:cNvPr id="13" name="Picture 12">
-            <a:extLst>
-              <a:ext uri="{FF2B5EF4-FFF2-40B4-BE49-F238E27FC236}">
-                <a16:creationId xmlns:a16="http://schemas.microsoft.com/office/drawing/2014/main" id="{8C318048-6B3E-8D28-5D63-0FF9C2D1CD05}"/>
-              </a:ext>
-            </a:extLst>
-          </p:cNvPr>
-          <p:cNvPicPr>
-            <a:picLocks noChangeAspect="1"/>
-          </p:cNvPicPr>
-          <p:nvPr/>
-        </p:nvPicPr>
-        <p:blipFill>
-          <a:blip r:embed="rId3">
-            <a:extLst>
-              <a:ext uri="{28A0092B-C50C-407E-A947-70E740481C1C}">
-                <a14:useLocalDpi xmlns:a14="http://schemas.microsoft.com/office/drawing/2010/main" val="0"/>
-              </a:ext>
-            </a:extLst>
-          </a:blip>
-          <a:stretch>
-            <a:fillRect/>
-          </a:stretch>
-        </p:blipFill>
-        <p:spPr>
-          <a:xfrm>
-            <a:off x="3593593" y="2203920"/>
-            <a:ext cx="3712791" cy="3300259"/>
-          </a:xfrm>
-          <a:prstGeom prst="rect">
-            <a:avLst/>
-          </a:prstGeom>
-        </p:spPr>
-      </p:pic>
-      <p:pic>
-        <p:nvPicPr>
-          <p:cNvPr id="16" name="Picture 15">
-            <a:extLst>
-              <a:ext uri="{FF2B5EF4-FFF2-40B4-BE49-F238E27FC236}">
-                <a16:creationId xmlns:a16="http://schemas.microsoft.com/office/drawing/2014/main" id="{ED26C63B-61BE-E21C-1A8B-D6C38269702F}"/>
-              </a:ext>
-            </a:extLst>
-          </p:cNvPr>
-          <p:cNvPicPr>
-            <a:picLocks noChangeAspect="1"/>
-          </p:cNvPicPr>
-          <p:nvPr/>
-        </p:nvPicPr>
-        <p:blipFill>
-          <a:blip r:embed="rId4">
-            <a:extLst>
-              <a:ext uri="{28A0092B-C50C-407E-A947-70E740481C1C}">
-                <a14:useLocalDpi xmlns:a14="http://schemas.microsoft.com/office/drawing/2010/main" val="0"/>
-              </a:ext>
-            </a:extLst>
-          </a:blip>
-          <a:stretch>
-            <a:fillRect/>
-          </a:stretch>
-        </p:blipFill>
-        <p:spPr>
-          <a:xfrm>
-            <a:off x="7187184" y="2203919"/>
-            <a:ext cx="5004816" cy="3336544"/>
-          </a:xfrm>
-          <a:prstGeom prst="rect">
-            <a:avLst/>
-          </a:prstGeom>
-        </p:spPr>
-      </p:pic>
-      <p:pic>
-        <p:nvPicPr>
-          <p:cNvPr id="12" name="Picture 11">
-            <a:extLst>
-              <a:ext uri="{FF2B5EF4-FFF2-40B4-BE49-F238E27FC236}">
-                <a16:creationId xmlns:a16="http://schemas.microsoft.com/office/drawing/2014/main" id="{02A840FB-BDFA-7532-DFCB-7667D6AFA169}"/>
-              </a:ext>
-            </a:extLst>
-          </p:cNvPr>
-          <p:cNvPicPr>
-            <a:picLocks noChangeAspect="1"/>
-          </p:cNvPicPr>
-          <p:nvPr/>
-        </p:nvPicPr>
-        <p:blipFill>
-          <a:blip r:embed="rId5">
             <a:extLst>
               <a:ext uri="{28A0092B-C50C-407E-A947-70E740481C1C}">
                 <a14:useLocalDpi xmlns:a14="http://schemas.microsoft.com/office/drawing/2010/main" val="0"/>
@@ -3511,6 +3403,115 @@
           </a:p>
         </p:txBody>
       </p:sp>
+      <p:pic>
+        <p:nvPicPr>
+          <p:cNvPr id="3" name="Picture 2">
+            <a:extLst>
+              <a:ext uri="{FF2B5EF4-FFF2-40B4-BE49-F238E27FC236}">
+                <a16:creationId xmlns:a16="http://schemas.microsoft.com/office/drawing/2014/main" id="{D3E74010-DA5C-9354-C5FB-637ACC90A18C}"/>
+              </a:ext>
+            </a:extLst>
+          </p:cNvPr>
+          <p:cNvPicPr>
+            <a:picLocks noChangeAspect="1"/>
+          </p:cNvPicPr>
+          <p:nvPr/>
+        </p:nvPicPr>
+        <p:blipFill>
+          <a:blip r:embed="rId3">
+            <a:extLst>
+              <a:ext uri="{28A0092B-C50C-407E-A947-70E740481C1C}">
+                <a14:useLocalDpi xmlns:a14="http://schemas.microsoft.com/office/drawing/2010/main" val="0"/>
+              </a:ext>
+            </a:extLst>
+          </a:blip>
+          <a:stretch>
+            <a:fillRect/>
+          </a:stretch>
+        </p:blipFill>
+        <p:spPr>
+          <a:xfrm>
+            <a:off x="0" y="2298009"/>
+            <a:ext cx="3742449" cy="3326621"/>
+          </a:xfrm>
+          <a:prstGeom prst="rect">
+            <a:avLst/>
+          </a:prstGeom>
+        </p:spPr>
+      </p:pic>
+      <p:pic>
+        <p:nvPicPr>
+          <p:cNvPr id="5" name="Picture 4">
+            <a:extLst>
+              <a:ext uri="{FF2B5EF4-FFF2-40B4-BE49-F238E27FC236}">
+                <a16:creationId xmlns:a16="http://schemas.microsoft.com/office/drawing/2014/main" id="{AC1FDC4C-E876-726F-1A8E-CABB1A79096B}"/>
+              </a:ext>
+            </a:extLst>
+          </p:cNvPr>
+          <p:cNvPicPr>
+            <a:picLocks noChangeAspect="1"/>
+          </p:cNvPicPr>
+          <p:nvPr/>
+        </p:nvPicPr>
+        <p:blipFill>
+          <a:blip r:embed="rId4">
+            <a:extLst>
+              <a:ext uri="{28A0092B-C50C-407E-A947-70E740481C1C}">
+                <a14:useLocalDpi xmlns:a14="http://schemas.microsoft.com/office/drawing/2010/main" val="0"/>
+              </a:ext>
+            </a:extLst>
+          </a:blip>
+          <a:stretch>
+            <a:fillRect/>
+          </a:stretch>
+        </p:blipFill>
+        <p:spPr>
+          <a:xfrm>
+            <a:off x="3656074" y="2306618"/>
+            <a:ext cx="3742449" cy="3326621"/>
+          </a:xfrm>
+          <a:prstGeom prst="rect">
+            <a:avLst/>
+          </a:prstGeom>
+        </p:spPr>
+      </p:pic>
+      <p:pic>
+        <p:nvPicPr>
+          <p:cNvPr id="7" name="Picture 6">
+            <a:extLst>
+              <a:ext uri="{FF2B5EF4-FFF2-40B4-BE49-F238E27FC236}">
+                <a16:creationId xmlns:a16="http://schemas.microsoft.com/office/drawing/2014/main" id="{75911D3A-B06E-AB61-0A0E-C12A5F709F52}"/>
+              </a:ext>
+            </a:extLst>
+          </p:cNvPr>
+          <p:cNvPicPr>
+            <a:picLocks noChangeAspect="1"/>
+          </p:cNvPicPr>
+          <p:nvPr/>
+        </p:nvPicPr>
+        <p:blipFill>
+          <a:blip r:embed="rId5">
+            <a:extLst>
+              <a:ext uri="{28A0092B-C50C-407E-A947-70E740481C1C}">
+                <a14:useLocalDpi xmlns:a14="http://schemas.microsoft.com/office/drawing/2010/main" val="0"/>
+              </a:ext>
+            </a:extLst>
+          </a:blip>
+          <a:srcRect l="1778" r="4055"/>
+          <a:stretch>
+            <a:fillRect/>
+          </a:stretch>
+        </p:blipFill>
+        <p:spPr>
+          <a:xfrm>
+            <a:off x="7398523" y="2306618"/>
+            <a:ext cx="4711003" cy="3335230"/>
+          </a:xfrm>
+          <a:prstGeom prst="rect">
+            <a:avLst/>
+          </a:prstGeom>
+        </p:spPr>
+      </p:pic>
     </p:spTree>
     <p:extLst>
       <p:ext uri="{BB962C8B-B14F-4D97-AF65-F5344CB8AC3E}">
